--- a/public/fun/pack/pptx/weddingpro/결혼식프리미엄_35_감사·답례중심_오닉스골드.pptx
+++ b/public/fun/pack/pptx/weddingpro/결혼식프리미엄_35_감사·답례중심_오닉스골드.pptx
@@ -113,12 +113,12 @@
   <p:extLst>
     <p:ext uri="{521415D9-36F7-43E2-AB2F-B90AF26B5E84}">
       <p14:sectionLst xmlns:p14="http://schemas.microsoft.com/office/powerpoint/2010/main">
-        <p14:section name="시작" id="{27C98E66-D391-4B76-B903-88E5567FF007}">
+        <p14:section name="시작" id="{4CB9EBDD-6BC8-4209-850D-33EF5DD5A1D8}">
           <p14:sldIdLst>
             <p14:sldId id="256"/>
           </p14:sldIdLst>
         </p14:section>
-        <p14:section name="본문" id="{A6E03A94-BDD2-4291-92B4-E4CD40B67D40}">
+        <p14:section name="본문" id="{8B80AEA7-FD42-47A0-B058-2A99FA85521C}">
           <p14:sldIdLst>
             <p14:sldId id="257"/>
             <p14:sldId id="258"/>
@@ -127,7 +127,7 @@
             <p14:sldId id="261"/>
           </p14:sldIdLst>
         </p14:section>
-        <p14:section name="마무리" id="{5C40E87B-8F74-4D4C-9E5F-2144C52A9C2B}">
+        <p14:section name="마무리" id="{44A5174B-5C97-4D8F-B7D9-A32623D716BE}">
           <p14:sldIdLst>
             <p14:sldId id="262"/>
           </p14:sldIdLst>
@@ -1530,7 +1530,7 @@
             </a:lvl1pPr>
           </a:lstStyle>
           <a:p>
-            <a:fld id="{AF5E942B-035A-4820-A899-512B5EF06E6A}" type="slidenum">
+            <a:fld id="{688AB686-DB18-4836-ACF9-A7F8AF2595B4}" type="slidenum">
               <a:rPr lang="en-US"/>
               <a:t>‹#›</a:t>
             </a:fld>
@@ -2210,7 +2210,7 @@
             </a:lvl1pPr>
           </a:lstStyle>
           <a:p>
-            <a:fld id="{94F7DE5B-58E0-44DA-A691-9052715CAA9C}" type="slidenum">
+            <a:fld id="{C5349AC1-D2C0-4DE4-9D6C-3D74E61B2F58}" type="slidenum">
               <a:rPr lang="en-US"/>
               <a:t>‹#›</a:t>
             </a:fld>
@@ -2899,7 +2899,7 @@
             </a:lvl1pPr>
           </a:lstStyle>
           <a:p>
-            <a:fld id="{C9258D17-FC3C-47BC-89F4-8FF22F59772C}" type="slidenum">
+            <a:fld id="{DFBC6DE0-8C95-4B14-A0E1-5D65ADB464EF}" type="slidenum">
               <a:rPr lang="en-US"/>
               <a:t>‹#›</a:t>
             </a:fld>
@@ -3750,7 +3750,7 @@
           <a:p>
             <a:r>
               <a:rPr lang="ko-KR"/>
-              <a:t>0000. 00. 00 · 예식장 이름</a:t>
+              <a:t>날짜 입력 · 예식장 이름</a:t>
             </a:r>
           </a:p>
         </p:txBody>
@@ -3971,7 +3971,7 @@
           <a:bodyPr/>
           <a:lstStyle/>
           <a:p>
-            <a:fld id="{A1C41416-21D3-411A-A6EB-85AFDB392CF1}" type="slidenum">
+            <a:fld id="{77FAC08F-2295-481F-BE68-90F5F11D1478}" type="slidenum">
               <a:rPr lang="en-US"/>
               <a:t>‹#›</a:t>
             </a:fld>
@@ -4371,7 +4371,7 @@
           <a:bodyPr/>
           <a:lstStyle/>
           <a:p>
-            <a:fld id="{FAC14545-34FF-4B21-B700-3F8C125DD28B}" type="slidenum">
+            <a:fld id="{1CEB9B66-9A99-4B31-8DA2-1904414DAFBD}" type="slidenum">
               <a:rPr lang="en-US"/>
               <a:t>‹#›</a:t>
             </a:fld>
@@ -4715,7 +4715,7 @@
           <a:bodyPr/>
           <a:lstStyle/>
           <a:p>
-            <a:fld id="{D73D9F4B-0210-48E0-9B83-FC82A226C000}" type="slidenum">
+            <a:fld id="{98A68ABD-6915-47A7-820C-BCFA6DD48254}" type="slidenum">
               <a:rPr lang="en-US"/>
               <a:t>‹#›</a:t>
             </a:fld>
@@ -6000,7 +6000,7 @@
           <a:bodyPr/>
           <a:lstStyle/>
           <a:p>
-            <a:fld id="{ED68FCDA-23B0-4368-B7ED-5EEC3628D3A9}" type="slidenum">
+            <a:fld id="{F37ED6C7-AC7F-43B4-8427-0F7B70E02293}" type="slidenum">
               <a:rPr lang="en-US"/>
               <a:t>‹#›</a:t>
             </a:fld>
@@ -6088,7 +6088,7 @@
           <a:bodyPr/>
           <a:lstStyle/>
           <a:p>
-            <a:fld id="{B0D811F6-D899-4177-A3A0-5854192845A3}" type="slidenum">
+            <a:fld id="{818B0EBE-4D8F-45B3-B4F5-27D414701B73}" type="slidenum">
               <a:rPr lang="en-US"/>
               <a:t>‹#›</a:t>
             </a:fld>
